--- a/slides/final_presentation.pptx
+++ b/slides/final_presentation.pptx
@@ -3237,7 +3237,7 @@
                   <a:srgbClr val="3A3A3A"/>
                 </a:solidFill>
               </a:rPr>
-              <a:t>Team: Yonatan Haba  ·  Shira Tziony</a:t>
+              <a:t>Team: Ohad Shpizhizen  ·  Shira Tziony</a:t>
             </a:r>
           </a:p>
         </p:txBody>

--- a/slides/final_presentation.pptx
+++ b/slides/final_presentation.pptx
@@ -3624,7 +3624,7 @@
                   <a:srgbClr val="3A3A3A"/>
                 </a:solidFill>
               </a:rPr>
-              <a:t>•  gauss noise: fine-tuning wins (enhance +0.056 vs fine-tune +0.089 mAP at high severity)</a:t>
+              <a:t>•  gauss noise: classical enhancement wins (enhance +0.172 vs fine-tune +0.086 mAP at high severity)</a:t>
             </a:r>
           </a:p>
           <a:p>
@@ -3654,7 +3654,7 @@
                   <a:srgbClr val="3A3A3A"/>
                 </a:solidFill>
               </a:rPr>
-              <a:t>•  motion blur: classical enhancement wins (enhance +0.073 vs fine-tune +0.056 mAP at high severity)</a:t>
+              <a:t>•  motion blur: classical enhancement wins (enhance +0.073 vs fine-tune +0.054 mAP at high severity)</a:t>
             </a:r>
           </a:p>
           <a:p>
@@ -3669,7 +3669,7 @@
                   <a:srgbClr val="3A3A3A"/>
                 </a:solidFill>
               </a:rPr>
-              <a:t>•  Enhancement is corruption-specific — each corruption needs its matched restorer</a:t>
+              <a:t>•  Enhancement is corruption-specific — each corruption needs its matched restorer, and the RIGHT one: NLM hurt what BM3D repairs (all 12 gauss cells flipped positive)</a:t>
             </a:r>
           </a:p>
           <a:p>
@@ -3684,7 +3684,7 @@
                   <a:srgbClr val="3A3A3A"/>
                 </a:solidFill>
               </a:rPr>
-              <a:t>•  Fine-tuning needs mixture training — single-corruption training negative-transfers to every other cell</a:t>
+              <a:t>•  Non-blind beats blind everywhere: logged kernel (Wiener), logged sigma (BM3D); a blind kernel guess measured worse than no restoration</a:t>
             </a:r>
           </a:p>
           <a:p>
@@ -3699,7 +3699,7 @@
                   <a:srgbClr val="3A3A3A"/>
                 </a:solidFill>
               </a:rPr>
-              <a:t>•  Blur is only repairable because the kernel is known (non-blind Wiener)</a:t>
+              <a:t>•  Fine-tune when the corruption is unknown (worst cell -0.012); stack restore+fine-tune for heavy blur — additive now that training saw restored images</a:t>
             </a:r>
           </a:p>
         </p:txBody>
@@ -3881,7 +3881,7 @@
                   <a:srgbClr val="3A3A3A"/>
                 </a:solidFill>
               </a:rPr>
-              <a:t>•  Wiener deconvolution uses the logged (oracle) kernel; blind deconvolution with a wrong angle measured WORSE than no restoration</a:t>
+              <a:t>•  Wiener and BM3D use the logged (oracle) degradation params; deployed systems must calibrate or estimate them (blind kernel guess measured WORSE than no restoration)</a:t>
             </a:r>
           </a:p>
           <a:p>
@@ -4335,7 +4335,7 @@
                   <a:srgbClr val="3A3A3A"/>
                 </a:solidFill>
               </a:rPr>
-              <a:t>•  Matched enhancement per corruption: sigma-adaptive NLM (Gaussian noise), median filter (salt &amp; pepper), non-blind Wiener with the logged kernel (motion blur)</a:t>
+              <a:t>•  Matched NON-BLIND enhancement per corruption: BM3D with the logged sigma (Gaussian noise), median filter (salt &amp; pepper), Wiener with the logged kernel (motion blur) — v2's NLM hurt pixel-precise tasks and is archived</a:t>
             </a:r>
           </a:p>
           <a:p>
@@ -4350,7 +4350,7 @@
                   <a:srgbClr val="3A3A3A"/>
                 </a:solidFill>
               </a:rPr>
-              <a:t>•  Fine-tune = per-image mixture of clean + all 9 corruption cells; AdamW lr 1e-4; held-out train split for checkpoint selection</a:t>
+              <a:t>•  Fine-tune = per-image mixture: 25% clean + 9 corruption cells, half of the corrupted picks classically restored (deployment domain); AdamW lr 1e-4; held-out train split for checkpoint selection</a:t>
             </a:r>
           </a:p>
           <a:p>
@@ -5580,7 +5580,7 @@
                   <a:srgbClr val="3A3A3A"/>
                 </a:solidFill>
               </a:rPr>
-              <a:t>•  gauss noise: enhancement recovers -39%–14% of the damage across tasks</a:t>
+              <a:t>•  gauss noise: enhancement recovers 10%–70% of the damage across tasks</a:t>
             </a:r>
           </a:p>
           <a:p>
@@ -5988,7 +5988,7 @@
                   <a:srgbClr val="3A3A3A"/>
                 </a:solidFill>
               </a:rPr>
-              <a:t>•  On clean images: fine-tuned mAP 0.284 vs pretrained 0.352 — clean cost = 0.068</a:t>
+              <a:t>•  On clean images: fine-tuned mAP 0.310 vs pretrained 0.352 — clean cost = 0.042</a:t>
             </a:r>
           </a:p>
           <a:p>
@@ -6003,7 +6003,7 @@
                   <a:srgbClr val="3A3A3A"/>
                 </a:solidFill>
               </a:rPr>
-              <a:t>•  In-domain recovery at high severity (absolute mAP): gauss noise +0.089, motion blur +0.056, salt pepper +0.124</a:t>
+              <a:t>•  In-domain recovery at high severity (absolute mAP): gauss noise +0.086, motion blur +0.054, salt pepper +0.124</a:t>
             </a:r>
           </a:p>
           <a:p>
@@ -6018,7 +6018,7 @@
                   <a:srgbClr val="3A3A3A"/>
                 </a:solidFill>
               </a:rPr>
-              <a:t>•  Combined repair (enhance + fine-tune) beats both single repairs on: motion_blur/high</a:t>
+              <a:t>•  Combined repair (enhance + fine-tune) beats both single repairs on: motion_blur/high, motion_blur/med</a:t>
             </a:r>
           </a:p>
         </p:txBody>
